--- a/rapports/septembre/Pierre_et_Vacances_sept2026.pptx
+++ b/rapports/septembre/Pierre_et_Vacances_sept2026.pptx
@@ -6007,7 +6007,7 @@
         <p:spPr>
           <a:xfrm>
             <a:off x="8296656" y="4389120"/>
-            <a:ext cx="2072640" cy="152400"/>
+            <a:ext cx="2225040" cy="152400"/>
           </a:xfrm>
           <a:prstGeom prst="rect">
             <a:avLst/>
@@ -6086,7 +6086,7 @@
         <p:spPr>
           <a:xfrm>
             <a:off x="8296656" y="4657344"/>
-            <a:ext cx="2072640" cy="152400"/>
+            <a:ext cx="2225040" cy="152400"/>
           </a:xfrm>
           <a:prstGeom prst="rect">
             <a:avLst/>
@@ -6165,7 +6165,7 @@
         <p:spPr>
           <a:xfrm>
             <a:off x="8296656" y="4925568"/>
-            <a:ext cx="2072640" cy="152400"/>
+            <a:ext cx="2225040" cy="152400"/>
           </a:xfrm>
           <a:prstGeom prst="rect">
             <a:avLst/>
@@ -6244,7 +6244,7 @@
         <p:spPr>
           <a:xfrm>
             <a:off x="8296656" y="5193792"/>
-            <a:ext cx="2072640" cy="152400"/>
+            <a:ext cx="2225040" cy="152400"/>
           </a:xfrm>
           <a:prstGeom prst="rect">
             <a:avLst/>
@@ -6323,7 +6323,7 @@
         <p:spPr>
           <a:xfrm>
             <a:off x="8296656" y="5462016"/>
-            <a:ext cx="2072640" cy="152400"/>
+            <a:ext cx="2225040" cy="152400"/>
           </a:xfrm>
           <a:prstGeom prst="rect">
             <a:avLst/>
@@ -6402,7 +6402,7 @@
         <p:spPr>
           <a:xfrm>
             <a:off x="8296656" y="5730240"/>
-            <a:ext cx="2072640" cy="152400"/>
+            <a:ext cx="2225040" cy="152400"/>
           </a:xfrm>
           <a:prstGeom prst="rect">
             <a:avLst/>

--- a/rapports/septembre/Pierre_et_Vacances_sept2026.pptx
+++ b/rapports/septembre/Pierre_et_Vacances_sept2026.pptx
@@ -5879,7 +5879,7 @@
                 </a:solidFill>
                 <a:latin typeface="Arial"/>
               </a:rPr>
-              <a:t>MARQUES CITÉES</a:t>
+              <a:t>CATÉGORIES DE PRODUITS</a:t>
             </a:r>
           </a:p>
         </p:txBody>
@@ -5914,7 +5914,7 @@
                 </a:solidFill>
                 <a:latin typeface="Arial"/>
               </a:rPr>
-              <a:t>Part de voix dans les messages utilisateurs</a:t>
+              <a:t>Répartition des requêtes</a:t>
             </a:r>
           </a:p>
         </p:txBody>
@@ -6022,13 +6022,13 @@
           <a:p>
             <a:pPr algn="l"/>
             <a:r>
-              <a:rPr sz="1000" b="0" i="0">
+              <a:rPr sz="800" b="0" i="0">
                 <a:solidFill>
                   <a:srgbClr val="111111"/>
                 </a:solidFill>
                 <a:latin typeface="Arial"/>
               </a:rPr>
-              <a:t>Airbnb</a:t>
+              <a:t>Résidences et appartements de vacances</a:t>
             </a:r>
           </a:p>
         </p:txBody>
@@ -6107,7 +6107,7 @@
                 </a:solidFill>
                 <a:latin typeface="Arial"/>
               </a:rPr>
-              <a:t>Booking · 17 %</a:t>
+              <a:t>Villages et clubs · 20 %</a:t>
             </a:r>
           </a:p>
         </p:txBody>
@@ -6186,7 +6186,7 @@
                 </a:solidFill>
                 <a:latin typeface="Arial"/>
               </a:rPr>
-              <a:t>Gîtes de France · 11 %</a:t>
+              <a:t>Séjours montagne et ski · 16 %</a:t>
             </a:r>
           </a:p>
         </p:txBody>
@@ -6265,7 +6265,7 @@
                 </a:solidFill>
                 <a:latin typeface="Arial"/>
               </a:rPr>
-              <a:t>Abritel · 7 %</a:t>
+              <a:t>Séjours mer et littoral · 14 %</a:t>
             </a:r>
           </a:p>
         </p:txBody>
@@ -6344,7 +6344,7 @@
                 </a:solidFill>
                 <a:latin typeface="Arial"/>
               </a:rPr>
-              <a:t>Pierre &amp; Vacances · 5 %</a:t>
+              <a:t>Week-ends et courts séjours · 8 %</a:t>
             </a:r>
           </a:p>
         </p:txBody>
@@ -6423,7 +6423,7 @@
                 </a:solidFill>
                 <a:latin typeface="Arial"/>
               </a:rPr>
-              <a:t>Autres · 35 %</a:t>
+              <a:t>Bien-être et activités · 4 %</a:t>
             </a:r>
           </a:p>
         </p:txBody>
@@ -6437,7 +6437,7 @@
         <p:spPr>
           <a:xfrm>
             <a:off x="10564368" y="4450080"/>
-            <a:ext cx="475488" cy="335280"/>
+            <a:ext cx="475488" cy="509625"/>
           </a:xfrm>
           <a:prstGeom prst="rect">
             <a:avLst/>
@@ -6481,7 +6481,7 @@
         <p:spPr>
           <a:xfrm>
             <a:off x="10564368" y="4450080"/>
-            <a:ext cx="475488" cy="335280"/>
+            <a:ext cx="475488" cy="509625"/>
           </a:xfrm>
           <a:prstGeom prst="rect">
             <a:avLst/>
@@ -6502,7 +6502,7 @@
                 </a:solidFill>
                 <a:latin typeface="Arial"/>
               </a:rPr>
-              <a:t>25 %</a:t>
+              <a:t>38 %</a:t>
             </a:r>
           </a:p>
         </p:txBody>
@@ -6515,8 +6515,8 @@
         </p:nvSpPr>
         <p:spPr>
           <a:xfrm>
-            <a:off x="10564368" y="4785360"/>
-            <a:ext cx="475488" cy="227990"/>
+            <a:off x="10564368" y="4959705"/>
+            <a:ext cx="475488" cy="268224"/>
           </a:xfrm>
           <a:prstGeom prst="rect">
             <a:avLst/>
@@ -6559,8 +6559,8 @@
         </p:nvSpPr>
         <p:spPr>
           <a:xfrm>
-            <a:off x="10564368" y="5013350"/>
-            <a:ext cx="475488" cy="147523"/>
+            <a:off x="10564368" y="5227929"/>
+            <a:ext cx="475488" cy="214579"/>
           </a:xfrm>
           <a:prstGeom prst="rect">
             <a:avLst/>
@@ -6603,8 +6603,8 @@
         </p:nvSpPr>
         <p:spPr>
           <a:xfrm>
-            <a:off x="10564368" y="5160873"/>
-            <a:ext cx="475488" cy="93878"/>
+            <a:off x="10564368" y="5442508"/>
+            <a:ext cx="475488" cy="187756"/>
           </a:xfrm>
           <a:prstGeom prst="rect">
             <a:avLst/>
@@ -6647,8 +6647,8 @@
         </p:nvSpPr>
         <p:spPr>
           <a:xfrm>
-            <a:off x="10564368" y="5254752"/>
-            <a:ext cx="475488" cy="67056"/>
+            <a:off x="10564368" y="5630265"/>
+            <a:ext cx="475488" cy="107289"/>
           </a:xfrm>
           <a:prstGeom prst="rect">
             <a:avLst/>
@@ -6691,8 +6691,8 @@
         </p:nvSpPr>
         <p:spPr>
           <a:xfrm>
-            <a:off x="10564368" y="5321808"/>
-            <a:ext cx="475488" cy="469392"/>
+            <a:off x="10564368" y="5737555"/>
+            <a:ext cx="475488" cy="53644"/>
           </a:xfrm>
           <a:prstGeom prst="rect">
             <a:avLst/>
@@ -6724,41 +6724,6 @@
           <a:lstStyle/>
           <a:p>
             <a:pPr algn="ctr"/>
-          </a:p>
-        </p:txBody>
-      </p:sp>
-      <p:sp>
-        <p:nvSpPr>
-          <p:cNvPr id="93" name="TextBox 92"/>
-          <p:cNvSpPr txBox="1"/>
-          <p:nvPr/>
-        </p:nvSpPr>
-        <p:spPr>
-          <a:xfrm>
-            <a:off x="10564368" y="5321808"/>
-            <a:ext cx="475488" cy="469392"/>
-          </a:xfrm>
-          <a:prstGeom prst="rect">
-            <a:avLst/>
-          </a:prstGeom>
-          <a:noFill/>
-        </p:spPr>
-        <p:txBody>
-          <a:bodyPr wrap="square" anchor="ctr" lIns="0" rIns="0" tIns="0" bIns="0">
-            <a:spAutoFit/>
-          </a:bodyPr>
-          <a:lstStyle/>
-          <a:p>
-            <a:pPr algn="ctr"/>
-            <a:r>
-              <a:rPr sz="1000" b="1" i="0">
-                <a:solidFill>
-                  <a:srgbClr val="FFFFFF"/>
-                </a:solidFill>
-                <a:latin typeface="Arial"/>
-              </a:rPr>
-              <a:t>35 %</a:t>
-            </a:r>
           </a:p>
         </p:txBody>
       </p:sp>

--- a/rapports/septembre/Pierre_et_Vacances_sept2026.pptx
+++ b/rapports/septembre/Pierre_et_Vacances_sept2026.pptx
@@ -6028,7 +6028,7 @@
                 </a:solidFill>
                 <a:latin typeface="Arial"/>
               </a:rPr>
-              <a:t>Résidences et appartements de vacances</a:t>
+              <a:t>Location de vacances France et Europe</a:t>
             </a:r>
           </a:p>
         </p:txBody>
@@ -6107,7 +6107,7 @@
                 </a:solidFill>
                 <a:latin typeface="Arial"/>
               </a:rPr>
-              <a:t>Villages et clubs · 20 %</a:t>
+              <a:t>Séjours montagne en hiver · 50 %</a:t>
             </a:r>
           </a:p>
         </p:txBody>
@@ -6120,324 +6120,8 @@
         </p:nvSpPr>
         <p:spPr>
           <a:xfrm>
-            <a:off x="8077200" y="4943856"/>
-            <a:ext cx="121920" cy="121920"/>
-          </a:xfrm>
-          <a:prstGeom prst="rect">
-            <a:avLst/>
-          </a:prstGeom>
-          <a:solidFill>
-            <a:srgbClr val="EB9A5E"/>
-          </a:solidFill>
-          <a:ln>
-            <a:noFill/>
-          </a:ln>
-          <a:effectLst/>
-        </p:spPr>
-        <p:style>
-          <a:lnRef idx="1">
-            <a:schemeClr val="accent1"/>
-          </a:lnRef>
-          <a:fillRef idx="3">
-            <a:schemeClr val="accent1"/>
-          </a:fillRef>
-          <a:effectRef idx="2">
-            <a:schemeClr val="accent1"/>
-          </a:effectRef>
-          <a:fontRef idx="minor">
-            <a:schemeClr val="lt1"/>
-          </a:fontRef>
-        </p:style>
-        <p:txBody>
-          <a:bodyPr rtlCol="0" anchor="ctr"/>
-          <a:lstStyle/>
-          <a:p>
-            <a:pPr algn="ctr"/>
-          </a:p>
-        </p:txBody>
-      </p:sp>
-      <p:sp>
-        <p:nvSpPr>
-          <p:cNvPr id="79" name="TextBox 78"/>
-          <p:cNvSpPr txBox="1"/>
-          <p:nvPr/>
-        </p:nvSpPr>
-        <p:spPr>
-          <a:xfrm>
-            <a:off x="8296656" y="4925568"/>
-            <a:ext cx="2225040" cy="152400"/>
-          </a:xfrm>
-          <a:prstGeom prst="rect">
-            <a:avLst/>
-          </a:prstGeom>
-          <a:noFill/>
-        </p:spPr>
-        <p:txBody>
-          <a:bodyPr wrap="square" anchor="t" lIns="0" rIns="0" tIns="0" bIns="0">
-            <a:spAutoFit/>
-          </a:bodyPr>
-          <a:lstStyle/>
-          <a:p>
-            <a:pPr algn="l"/>
-            <a:r>
-              <a:rPr sz="1000" b="0" i="0">
-                <a:solidFill>
-                  <a:srgbClr val="111111"/>
-                </a:solidFill>
-                <a:latin typeface="Arial"/>
-              </a:rPr>
-              <a:t>Séjours montagne et ski · 16 %</a:t>
-            </a:r>
-          </a:p>
-        </p:txBody>
-      </p:sp>
-      <p:sp>
-        <p:nvSpPr>
-          <p:cNvPr id="80" name="Rectangle 79"/>
-          <p:cNvSpPr/>
-          <p:nvPr/>
-        </p:nvSpPr>
-        <p:spPr>
-          <a:xfrm>
-            <a:off x="8077200" y="5212080"/>
-            <a:ext cx="121920" cy="121920"/>
-          </a:xfrm>
-          <a:prstGeom prst="rect">
-            <a:avLst/>
-          </a:prstGeom>
-          <a:solidFill>
-            <a:srgbClr val="EE6A2C"/>
-          </a:solidFill>
-          <a:ln>
-            <a:noFill/>
-          </a:ln>
-          <a:effectLst/>
-        </p:spPr>
-        <p:style>
-          <a:lnRef idx="1">
-            <a:schemeClr val="accent1"/>
-          </a:lnRef>
-          <a:fillRef idx="3">
-            <a:schemeClr val="accent1"/>
-          </a:fillRef>
-          <a:effectRef idx="2">
-            <a:schemeClr val="accent1"/>
-          </a:effectRef>
-          <a:fontRef idx="minor">
-            <a:schemeClr val="lt1"/>
-          </a:fontRef>
-        </p:style>
-        <p:txBody>
-          <a:bodyPr rtlCol="0" anchor="ctr"/>
-          <a:lstStyle/>
-          <a:p>
-            <a:pPr algn="ctr"/>
-          </a:p>
-        </p:txBody>
-      </p:sp>
-      <p:sp>
-        <p:nvSpPr>
-          <p:cNvPr id="81" name="TextBox 80"/>
-          <p:cNvSpPr txBox="1"/>
-          <p:nvPr/>
-        </p:nvSpPr>
-        <p:spPr>
-          <a:xfrm>
-            <a:off x="8296656" y="5193792"/>
-            <a:ext cx="2225040" cy="152400"/>
-          </a:xfrm>
-          <a:prstGeom prst="rect">
-            <a:avLst/>
-          </a:prstGeom>
-          <a:noFill/>
-        </p:spPr>
-        <p:txBody>
-          <a:bodyPr wrap="square" anchor="t" lIns="0" rIns="0" tIns="0" bIns="0">
-            <a:spAutoFit/>
-          </a:bodyPr>
-          <a:lstStyle/>
-          <a:p>
-            <a:pPr algn="l"/>
-            <a:r>
-              <a:rPr sz="1000" b="0" i="0">
-                <a:solidFill>
-                  <a:srgbClr val="111111"/>
-                </a:solidFill>
-                <a:latin typeface="Arial"/>
-              </a:rPr>
-              <a:t>Séjours mer et littoral · 14 %</a:t>
-            </a:r>
-          </a:p>
-        </p:txBody>
-      </p:sp>
-      <p:sp>
-        <p:nvSpPr>
-          <p:cNvPr id="82" name="Rectangle 81"/>
-          <p:cNvSpPr/>
-          <p:nvPr/>
-        </p:nvSpPr>
-        <p:spPr>
-          <a:xfrm>
-            <a:off x="8077200" y="5480304"/>
-            <a:ext cx="121920" cy="121920"/>
-          </a:xfrm>
-          <a:prstGeom prst="rect">
-            <a:avLst/>
-          </a:prstGeom>
-          <a:solidFill>
-            <a:srgbClr val="3E5A78"/>
-          </a:solidFill>
-          <a:ln>
-            <a:noFill/>
-          </a:ln>
-          <a:effectLst/>
-        </p:spPr>
-        <p:style>
-          <a:lnRef idx="1">
-            <a:schemeClr val="accent1"/>
-          </a:lnRef>
-          <a:fillRef idx="3">
-            <a:schemeClr val="accent1"/>
-          </a:fillRef>
-          <a:effectRef idx="2">
-            <a:schemeClr val="accent1"/>
-          </a:effectRef>
-          <a:fontRef idx="minor">
-            <a:schemeClr val="lt1"/>
-          </a:fontRef>
-        </p:style>
-        <p:txBody>
-          <a:bodyPr rtlCol="0" anchor="ctr"/>
-          <a:lstStyle/>
-          <a:p>
-            <a:pPr algn="ctr"/>
-          </a:p>
-        </p:txBody>
-      </p:sp>
-      <p:sp>
-        <p:nvSpPr>
-          <p:cNvPr id="83" name="TextBox 82"/>
-          <p:cNvSpPr txBox="1"/>
-          <p:nvPr/>
-        </p:nvSpPr>
-        <p:spPr>
-          <a:xfrm>
-            <a:off x="8296656" y="5462016"/>
-            <a:ext cx="2225040" cy="152400"/>
-          </a:xfrm>
-          <a:prstGeom prst="rect">
-            <a:avLst/>
-          </a:prstGeom>
-          <a:noFill/>
-        </p:spPr>
-        <p:txBody>
-          <a:bodyPr wrap="square" anchor="t" lIns="0" rIns="0" tIns="0" bIns="0">
-            <a:spAutoFit/>
-          </a:bodyPr>
-          <a:lstStyle/>
-          <a:p>
-            <a:pPr algn="l"/>
-            <a:r>
-              <a:rPr sz="1000" b="0" i="0">
-                <a:solidFill>
-                  <a:srgbClr val="111111"/>
-                </a:solidFill>
-                <a:latin typeface="Arial"/>
-              </a:rPr>
-              <a:t>Week-ends et courts séjours · 8 %</a:t>
-            </a:r>
-          </a:p>
-        </p:txBody>
-      </p:sp>
-      <p:sp>
-        <p:nvSpPr>
-          <p:cNvPr id="84" name="Rectangle 83"/>
-          <p:cNvSpPr/>
-          <p:nvPr/>
-        </p:nvSpPr>
-        <p:spPr>
-          <a:xfrm>
-            <a:off x="8077200" y="5748528"/>
-            <a:ext cx="121920" cy="121920"/>
-          </a:xfrm>
-          <a:prstGeom prst="rect">
-            <a:avLst/>
-          </a:prstGeom>
-          <a:solidFill>
-            <a:srgbClr val="A09278"/>
-          </a:solidFill>
-          <a:ln>
-            <a:noFill/>
-          </a:ln>
-          <a:effectLst/>
-        </p:spPr>
-        <p:style>
-          <a:lnRef idx="1">
-            <a:schemeClr val="accent1"/>
-          </a:lnRef>
-          <a:fillRef idx="3">
-            <a:schemeClr val="accent1"/>
-          </a:fillRef>
-          <a:effectRef idx="2">
-            <a:schemeClr val="accent1"/>
-          </a:effectRef>
-          <a:fontRef idx="minor">
-            <a:schemeClr val="lt1"/>
-          </a:fontRef>
-        </p:style>
-        <p:txBody>
-          <a:bodyPr rtlCol="0" anchor="ctr"/>
-          <a:lstStyle/>
-          <a:p>
-            <a:pPr algn="ctr"/>
-          </a:p>
-        </p:txBody>
-      </p:sp>
-      <p:sp>
-        <p:nvSpPr>
-          <p:cNvPr id="85" name="TextBox 84"/>
-          <p:cNvSpPr txBox="1"/>
-          <p:nvPr/>
-        </p:nvSpPr>
-        <p:spPr>
-          <a:xfrm>
-            <a:off x="8296656" y="5730240"/>
-            <a:ext cx="2225040" cy="152400"/>
-          </a:xfrm>
-          <a:prstGeom prst="rect">
-            <a:avLst/>
-          </a:prstGeom>
-          <a:noFill/>
-        </p:spPr>
-        <p:txBody>
-          <a:bodyPr wrap="square" anchor="t" lIns="0" rIns="0" tIns="0" bIns="0">
-            <a:spAutoFit/>
-          </a:bodyPr>
-          <a:lstStyle/>
-          <a:p>
-            <a:pPr algn="l"/>
-            <a:r>
-              <a:rPr sz="1000" b="0" i="0">
-                <a:solidFill>
-                  <a:srgbClr val="111111"/>
-                </a:solidFill>
-                <a:latin typeface="Arial"/>
-              </a:rPr>
-              <a:t>Bien-être et activités · 4 %</a:t>
-            </a:r>
-          </a:p>
-        </p:txBody>
-      </p:sp>
-      <p:sp>
-        <p:nvSpPr>
-          <p:cNvPr id="86" name="Rectangle 85"/>
-          <p:cNvSpPr/>
-          <p:nvPr/>
-        </p:nvSpPr>
-        <p:spPr>
-          <a:xfrm>
             <a:off x="10564368" y="4450080"/>
-            <a:ext cx="475488" cy="509625"/>
+            <a:ext cx="475488" cy="670560"/>
           </a:xfrm>
           <a:prstGeom prst="rect">
             <a:avLst/>
@@ -6474,14 +6158,14 @@
       </p:sp>
       <p:sp>
         <p:nvSpPr>
-          <p:cNvPr id="87" name="TextBox 86"/>
+          <p:cNvPr id="79" name="TextBox 78"/>
           <p:cNvSpPr txBox="1"/>
           <p:nvPr/>
         </p:nvSpPr>
         <p:spPr>
           <a:xfrm>
             <a:off x="10564368" y="4450080"/>
-            <a:ext cx="475488" cy="509625"/>
+            <a:ext cx="475488" cy="670560"/>
           </a:xfrm>
           <a:prstGeom prst="rect">
             <a:avLst/>
@@ -6502,21 +6186,21 @@
                 </a:solidFill>
                 <a:latin typeface="Arial"/>
               </a:rPr>
-              <a:t>38 %</a:t>
-            </a:r>
-          </a:p>
-        </p:txBody>
-      </p:sp>
-      <p:sp>
-        <p:nvSpPr>
-          <p:cNvPr id="88" name="Rectangle 87"/>
+              <a:t>50 %</a:t>
+            </a:r>
+          </a:p>
+        </p:txBody>
+      </p:sp>
+      <p:sp>
+        <p:nvSpPr>
+          <p:cNvPr id="80" name="Rectangle 79"/>
           <p:cNvSpPr/>
           <p:nvPr/>
         </p:nvSpPr>
         <p:spPr>
           <a:xfrm>
-            <a:off x="10564368" y="4959705"/>
-            <a:ext cx="475488" cy="268224"/>
+            <a:off x="10564368" y="5120640"/>
+            <a:ext cx="475488" cy="670560"/>
           </a:xfrm>
           <a:prstGeom prst="rect">
             <a:avLst/>
@@ -6553,177 +6237,36 @@
       </p:sp>
       <p:sp>
         <p:nvSpPr>
-          <p:cNvPr id="89" name="Rectangle 88"/>
-          <p:cNvSpPr/>
-          <p:nvPr/>
-        </p:nvSpPr>
-        <p:spPr>
-          <a:xfrm>
-            <a:off x="10564368" y="5227929"/>
-            <a:ext cx="475488" cy="214579"/>
-          </a:xfrm>
-          <a:prstGeom prst="rect">
-            <a:avLst/>
-          </a:prstGeom>
-          <a:solidFill>
-            <a:srgbClr val="EB9A5E"/>
-          </a:solidFill>
-          <a:ln>
-            <a:noFill/>
-          </a:ln>
-          <a:effectLst/>
-        </p:spPr>
-        <p:style>
-          <a:lnRef idx="1">
-            <a:schemeClr val="accent1"/>
-          </a:lnRef>
-          <a:fillRef idx="3">
-            <a:schemeClr val="accent1"/>
-          </a:fillRef>
-          <a:effectRef idx="2">
-            <a:schemeClr val="accent1"/>
-          </a:effectRef>
-          <a:fontRef idx="minor">
-            <a:schemeClr val="lt1"/>
-          </a:fontRef>
-        </p:style>
-        <p:txBody>
-          <a:bodyPr rtlCol="0" anchor="ctr"/>
+          <p:cNvPr id="81" name="TextBox 80"/>
+          <p:cNvSpPr txBox="1"/>
+          <p:nvPr/>
+        </p:nvSpPr>
+        <p:spPr>
+          <a:xfrm>
+            <a:off x="10564368" y="5120640"/>
+            <a:ext cx="475488" cy="670560"/>
+          </a:xfrm>
+          <a:prstGeom prst="rect">
+            <a:avLst/>
+          </a:prstGeom>
+          <a:noFill/>
+        </p:spPr>
+        <p:txBody>
+          <a:bodyPr wrap="square" anchor="ctr" lIns="0" rIns="0" tIns="0" bIns="0">
+            <a:spAutoFit/>
+          </a:bodyPr>
           <a:lstStyle/>
           <a:p>
             <a:pPr algn="ctr"/>
-          </a:p>
-        </p:txBody>
-      </p:sp>
-      <p:sp>
-        <p:nvSpPr>
-          <p:cNvPr id="90" name="Rectangle 89"/>
-          <p:cNvSpPr/>
-          <p:nvPr/>
-        </p:nvSpPr>
-        <p:spPr>
-          <a:xfrm>
-            <a:off x="10564368" y="5442508"/>
-            <a:ext cx="475488" cy="187756"/>
-          </a:xfrm>
-          <a:prstGeom prst="rect">
-            <a:avLst/>
-          </a:prstGeom>
-          <a:solidFill>
-            <a:srgbClr val="EE6A2C"/>
-          </a:solidFill>
-          <a:ln>
-            <a:noFill/>
-          </a:ln>
-          <a:effectLst/>
-        </p:spPr>
-        <p:style>
-          <a:lnRef idx="1">
-            <a:schemeClr val="accent1"/>
-          </a:lnRef>
-          <a:fillRef idx="3">
-            <a:schemeClr val="accent1"/>
-          </a:fillRef>
-          <a:effectRef idx="2">
-            <a:schemeClr val="accent1"/>
-          </a:effectRef>
-          <a:fontRef idx="minor">
-            <a:schemeClr val="lt1"/>
-          </a:fontRef>
-        </p:style>
-        <p:txBody>
-          <a:bodyPr rtlCol="0" anchor="ctr"/>
-          <a:lstStyle/>
-          <a:p>
-            <a:pPr algn="ctr"/>
-          </a:p>
-        </p:txBody>
-      </p:sp>
-      <p:sp>
-        <p:nvSpPr>
-          <p:cNvPr id="91" name="Rectangle 90"/>
-          <p:cNvSpPr/>
-          <p:nvPr/>
-        </p:nvSpPr>
-        <p:spPr>
-          <a:xfrm>
-            <a:off x="10564368" y="5630265"/>
-            <a:ext cx="475488" cy="107289"/>
-          </a:xfrm>
-          <a:prstGeom prst="rect">
-            <a:avLst/>
-          </a:prstGeom>
-          <a:solidFill>
-            <a:srgbClr val="3E5A78"/>
-          </a:solidFill>
-          <a:ln>
-            <a:noFill/>
-          </a:ln>
-          <a:effectLst/>
-        </p:spPr>
-        <p:style>
-          <a:lnRef idx="1">
-            <a:schemeClr val="accent1"/>
-          </a:lnRef>
-          <a:fillRef idx="3">
-            <a:schemeClr val="accent1"/>
-          </a:fillRef>
-          <a:effectRef idx="2">
-            <a:schemeClr val="accent1"/>
-          </a:effectRef>
-          <a:fontRef idx="minor">
-            <a:schemeClr val="lt1"/>
-          </a:fontRef>
-        </p:style>
-        <p:txBody>
-          <a:bodyPr rtlCol="0" anchor="ctr"/>
-          <a:lstStyle/>
-          <a:p>
-            <a:pPr algn="ctr"/>
-          </a:p>
-        </p:txBody>
-      </p:sp>
-      <p:sp>
-        <p:nvSpPr>
-          <p:cNvPr id="92" name="Rectangle 91"/>
-          <p:cNvSpPr/>
-          <p:nvPr/>
-        </p:nvSpPr>
-        <p:spPr>
-          <a:xfrm>
-            <a:off x="10564368" y="5737555"/>
-            <a:ext cx="475488" cy="53644"/>
-          </a:xfrm>
-          <a:prstGeom prst="rect">
-            <a:avLst/>
-          </a:prstGeom>
-          <a:solidFill>
-            <a:srgbClr val="A09278"/>
-          </a:solidFill>
-          <a:ln>
-            <a:noFill/>
-          </a:ln>
-          <a:effectLst/>
-        </p:spPr>
-        <p:style>
-          <a:lnRef idx="1">
-            <a:schemeClr val="accent1"/>
-          </a:lnRef>
-          <a:fillRef idx="3">
-            <a:schemeClr val="accent1"/>
-          </a:fillRef>
-          <a:effectRef idx="2">
-            <a:schemeClr val="accent1"/>
-          </a:effectRef>
-          <a:fontRef idx="minor">
-            <a:schemeClr val="lt1"/>
-          </a:fontRef>
-        </p:style>
-        <p:txBody>
-          <a:bodyPr rtlCol="0" anchor="ctr"/>
-          <a:lstStyle/>
-          <a:p>
-            <a:pPr algn="ctr"/>
+            <a:r>
+              <a:rPr sz="1000" b="1" i="0">
+                <a:solidFill>
+                  <a:srgbClr val="FFFFFF"/>
+                </a:solidFill>
+                <a:latin typeface="Arial"/>
+              </a:rPr>
+              <a:t>50 %</a:t>
+            </a:r>
           </a:p>
         </p:txBody>
       </p:sp>
@@ -7128,7 +6671,7 @@
                 </a:solidFill>
                 <a:latin typeface="Arial"/>
               </a:rPr>
-              <a:t>Les vacances déclenchent presque toutes les conversations</a:t>
+              <a:t>Deux annonces au même niveau</a:t>
             </a:r>
           </a:p>
         </p:txBody>
@@ -7163,7 +6706,7 @@
                 </a:solidFill>
                 <a:latin typeface="Arial"/>
               </a:rPr>
-              <a:t>91,2 % des conversations du secteur sont déclenchées par un départ en vacances.</a:t>
+              <a:t>L'annonce location France et Europe (1,03 fois le CTR moyen) et l'annonce montagne en hiver (0,97 fois) se partagent la diffusion à parts égales.</a:t>
             </a:r>
           </a:p>
         </p:txBody>
@@ -7198,7 +6741,7 @@
                 </a:solidFill>
                 <a:latin typeface="Arial"/>
               </a:rPr>
-              <a:t>→  Associer chaque résidence à une période de départ : vacances scolaires, week-ends prolongés.</a:t>
+              <a:t>→  Ajouter des annonces par destination pour identifier ce qui clique le plus.</a:t>
             </a:r>
           </a:p>
         </p:txBody>
@@ -7314,7 +6857,7 @@
                 </a:solidFill>
                 <a:latin typeface="Arial"/>
               </a:rPr>
-              <a:t>7e marque citée, en progression</a:t>
+              <a:t>Préparer la saison d'hiver</a:t>
             </a:r>
           </a:p>
         </p:txBody>
@@ -7349,7 +6892,7 @@
                 </a:solidFill>
                 <a:latin typeface="Arial"/>
               </a:rPr>
-              <a:t>Pierre &amp; Vacances pèse 4,7 % de part de voix (+2,1 pts), derrière Airbnb (24,8 %), Booking (16,6 %) et Gîtes de France (11,3 %).</a:t>
+              <a:t>La moitié de la diffusion porte déjà sur les séjours à la montagne cet hiver.</a:t>
             </a:r>
           </a:p>
         </p:txBody>
@@ -7384,7 +6927,7 @@
                 </a:solidFill>
                 <a:latin typeface="Arial"/>
               </a:rPr>
-              <a:t>→  Mettre en avant ce qui distingue les résidences : services, piscine, emplacements.</a:t>
+              <a:t>→  Mettre en avant les résidences près des pistes pour les vacances de Noël et d'hiver.</a:t>
             </a:r>
           </a:p>
         </p:txBody>
@@ -7500,7 +7043,7 @@
                 </a:solidFill>
                 <a:latin typeface="Arial"/>
               </a:rPr>
-              <a:t>Être recommandé spontanément par les IA</a:t>
+              <a:t>91 % des conversations partent d'un départ en vacances</a:t>
             </a:r>
           </a:p>
         </p:txBody>
@@ -7535,7 +7078,7 @@
                 </a:solidFill>
                 <a:latin typeface="Arial"/>
               </a:rPr>
-              <a:t>Les IA recommandent spontanément Maeva (19,4 %) et Lagrange (19,0 %), mais citent Pierre &amp; Vacances dans moins de 0,1 % des cas. Côté ads : 2,8 % (+2,8 pts).</a:t>
+              <a:t>Le départ en vacances déclenche presque toutes les conversations du secteur.</a:t>
             </a:r>
           </a:p>
         </p:txBody>
@@ -7570,7 +7113,7 @@
                 </a:solidFill>
                 <a:latin typeface="Arial"/>
               </a:rPr>
-              <a:t>→  Développer la présence ads et les contenus de marque pour entrer dans les recommandations.</a:t>
+              <a:t>→  Associer chaque résidence à une période de départ : Noël, vacances d'hiver, week-ends prolongés.</a:t>
             </a:r>
           </a:p>
         </p:txBody>
@@ -7721,7 +7264,7 @@
                 </a:solidFill>
                 <a:latin typeface="Arial"/>
               </a:rPr>
-              <a:t>Lancée le 15/09, la campagne génère 638 950 impressions et 3 144 clics en 16 jours, pour un CTR de 0,49 %.</a:t>
+              <a:t>Lancée le 15/09, la campagne génère 3 144 clics en 16 jours, pour un CTR de 0,49 %.</a:t>
             </a:r>
           </a:p>
         </p:txBody>
@@ -7756,7 +7299,7 @@
                 </a:solidFill>
                 <a:latin typeface="Arial"/>
               </a:rPr>
-              <a:t>→  Poursuivre la diffusion et préparer les messages des vacances de Noël et d'hiver.</a:t>
+              <a:t>→  Poursuivre la diffusion sur la saison d'hiver.</a:t>
             </a:r>
           </a:p>
         </p:txBody>

--- a/rapports/septembre/Pierre_et_Vacances_sept2026.pptx
+++ b/rapports/septembre/Pierre_et_Vacances_sept2026.pptx
@@ -7043,7 +7043,7 @@
                 </a:solidFill>
                 <a:latin typeface="Arial"/>
               </a:rPr>
-              <a:t>91 % des conversations partent d'un départ en vacances</a:t>
+              <a:t>Des annonces sans destination ni prix</a:t>
             </a:r>
           </a:p>
         </p:txBody>
@@ -7078,7 +7078,7 @@
                 </a:solidFill>
                 <a:latin typeface="Arial"/>
               </a:rPr>
-              <a:t>Le départ en vacances déclenche presque toutes les conversations du secteur.</a:t>
+              <a:t>Les deux annonces restent génériques (« à la mer comme à la montagne », « près des pistes ») : aucune ne cite une station, une ville ou un prix.</a:t>
             </a:r>
           </a:p>
         </p:txBody>
@@ -7113,7 +7113,7 @@
                 </a:solidFill>
                 <a:latin typeface="Arial"/>
               </a:rPr>
-              <a:t>→  Associer chaque résidence à une période de départ : Noël, vacances d'hiver, week-ends prolongés.</a:t>
+              <a:t>→  Tester des annonces par station ou destination, avec un prix d'appel.</a:t>
             </a:r>
           </a:p>
         </p:txBody>

--- a/rapports/septembre/Pierre_et_Vacances_sept2026.pptx
+++ b/rapports/septembre/Pierre_et_Vacances_sept2026.pptx
@@ -7078,7 +7078,7 @@
                 </a:solidFill>
                 <a:latin typeface="Arial"/>
               </a:rPr>
-              <a:t>Les deux annonces restent génériques (« à la mer comme à la montagne », « près des pistes ») : aucune ne cite une station, une ville ou un prix.</a:t>
+              <a:t>Les deux annonces restent génériques (« à la mer comme à la montagne », « près des pistes ») ; aucune ne cite une station, une ville ou un prix.</a:t>
             </a:r>
           </a:p>
         </p:txBody>
